--- a/ZEN_기술보고서.pptx
+++ b/ZEN_기술보고서.pptx
@@ -1871,7 +1871,7 @@
                 <a:ea typeface="Malgun Gothic" pitchFamily="34" charset="-122"/>
                 <a:cs typeface="Malgun Gothic" pitchFamily="34" charset="-120"/>
               </a:rPr>
-              <a:t>단일 HTML 6.5MB · 의존성 0</a:t>
+              <a:t>단일 HTML 7.5MB · 의존성 0</a:t>
             </a:r>
             <a:endParaRPr lang="en-US" sz="1350" dirty="0"/>
           </a:p>
@@ -2326,7 +2326,7 @@
                 <a:ea typeface="Malgun Gothic" pitchFamily="34" charset="-122"/>
                 <a:cs typeface="Malgun Gothic" pitchFamily="34" charset="-120"/>
               </a:rPr>
-              <a:t>단일 HTML 6.5MB · 바닐라 JS · 의존성 0 · 생성형 AI 페어 개발</a:t>
+              <a:t>단일 HTML 7.5MB · 바닐라 JS · 의존성 0 · 생성형 AI 페어 개발</a:t>
             </a:r>
             <a:endParaRPr lang="en-US" sz="1350" dirty="0"/>
           </a:p>
@@ -4419,7 +4419,7 @@
                 <a:ea typeface="Malgun Gothic" pitchFamily="34" charset="-122"/>
                 <a:cs typeface="Malgun Gothic" pitchFamily="34" charset="-120"/>
               </a:rPr>
-              <a:t>플랫폼 전체가 HTML 6.5MB 한 개 — 서버·설치·계정 없이 더블클릭으로 실행 (현장 앱 5종 내장)</a:t>
+              <a:t>플랫폼 전체가 HTML 7.5MB 한 개 — 서버·설치·계정 없이 더블클릭으로 실행 (현장 앱 6종 내장)</a:t>
             </a:r>
             <a:endParaRPr lang="en-US" sz="1100" dirty="0"/>
           </a:p>
@@ -9131,7 +9131,7 @@
                 <a:ea typeface="Malgun Gothic" pitchFamily="34" charset="-122"/>
                 <a:cs typeface="Malgun Gothic" pitchFamily="34" charset="-120"/>
               </a:rPr>
-              <a:t>현장 앱 5종을 플랫폼에 내장(gzip) — 폐쇄망에서도 역할별(현장/관리자) 화면 그대로 실행</a:t>
+              <a:t>현장 앱 6종을 플랫폼에 내장(gzip) — 폐쇄망에서도 역할별(현장/관리자) 화면 그대로 실행</a:t>
             </a:r>
             <a:endParaRPr lang="en-US" sz="1150" dirty="0"/>
           </a:p>
